--- a/prezentacie/p21w.pptx
+++ b/prezentacie/p21w.pptx
@@ -261,7 +261,7 @@
           <a:p>
             <a:fld id="{10052495-8BC8-4CFB-94B1-B0429F101A0D}" type="datetimeFigureOut">
               <a:rPr lang="sk-SK" smtClean="0"/>
-              <a:t>19. 3. 2026</a:t>
+              <a:t>24. 3. 2026</a:t>
             </a:fld>
             <a:endParaRPr lang="sk-SK"/>
           </a:p>
@@ -431,7 +431,7 @@
           <a:p>
             <a:fld id="{10052495-8BC8-4CFB-94B1-B0429F101A0D}" type="datetimeFigureOut">
               <a:rPr lang="sk-SK" smtClean="0"/>
-              <a:t>19. 3. 2026</a:t>
+              <a:t>24. 3. 2026</a:t>
             </a:fld>
             <a:endParaRPr lang="sk-SK"/>
           </a:p>
@@ -611,7 +611,7 @@
           <a:p>
             <a:fld id="{10052495-8BC8-4CFB-94B1-B0429F101A0D}" type="datetimeFigureOut">
               <a:rPr lang="sk-SK" smtClean="0"/>
-              <a:t>19. 3. 2026</a:t>
+              <a:t>24. 3. 2026</a:t>
             </a:fld>
             <a:endParaRPr lang="sk-SK"/>
           </a:p>
@@ -781,7 +781,7 @@
           <a:p>
             <a:fld id="{10052495-8BC8-4CFB-94B1-B0429F101A0D}" type="datetimeFigureOut">
               <a:rPr lang="sk-SK" smtClean="0"/>
-              <a:t>19. 3. 2026</a:t>
+              <a:t>24. 3. 2026</a:t>
             </a:fld>
             <a:endParaRPr lang="sk-SK"/>
           </a:p>
@@ -1027,7 +1027,7 @@
           <a:p>
             <a:fld id="{10052495-8BC8-4CFB-94B1-B0429F101A0D}" type="datetimeFigureOut">
               <a:rPr lang="sk-SK" smtClean="0"/>
-              <a:t>19. 3. 2026</a:t>
+              <a:t>24. 3. 2026</a:t>
             </a:fld>
             <a:endParaRPr lang="sk-SK"/>
           </a:p>
@@ -1259,7 +1259,7 @@
           <a:p>
             <a:fld id="{10052495-8BC8-4CFB-94B1-B0429F101A0D}" type="datetimeFigureOut">
               <a:rPr lang="sk-SK" smtClean="0"/>
-              <a:t>19. 3. 2026</a:t>
+              <a:t>24. 3. 2026</a:t>
             </a:fld>
             <a:endParaRPr lang="sk-SK"/>
           </a:p>
@@ -1626,7 +1626,7 @@
           <a:p>
             <a:fld id="{10052495-8BC8-4CFB-94B1-B0429F101A0D}" type="datetimeFigureOut">
               <a:rPr lang="sk-SK" smtClean="0"/>
-              <a:t>19. 3. 2026</a:t>
+              <a:t>24. 3. 2026</a:t>
             </a:fld>
             <a:endParaRPr lang="sk-SK"/>
           </a:p>
@@ -1744,7 +1744,7 @@
           <a:p>
             <a:fld id="{10052495-8BC8-4CFB-94B1-B0429F101A0D}" type="datetimeFigureOut">
               <a:rPr lang="sk-SK" smtClean="0"/>
-              <a:t>19. 3. 2026</a:t>
+              <a:t>24. 3. 2026</a:t>
             </a:fld>
             <a:endParaRPr lang="sk-SK"/>
           </a:p>
@@ -1839,7 +1839,7 @@
           <a:p>
             <a:fld id="{10052495-8BC8-4CFB-94B1-B0429F101A0D}" type="datetimeFigureOut">
               <a:rPr lang="sk-SK" smtClean="0"/>
-              <a:t>19. 3. 2026</a:t>
+              <a:t>24. 3. 2026</a:t>
             </a:fld>
             <a:endParaRPr lang="sk-SK"/>
           </a:p>
@@ -2116,7 +2116,7 @@
           <a:p>
             <a:fld id="{10052495-8BC8-4CFB-94B1-B0429F101A0D}" type="datetimeFigureOut">
               <a:rPr lang="sk-SK" smtClean="0"/>
-              <a:t>19. 3. 2026</a:t>
+              <a:t>24. 3. 2026</a:t>
             </a:fld>
             <a:endParaRPr lang="sk-SK"/>
           </a:p>
@@ -2373,7 +2373,7 @@
           <a:p>
             <a:fld id="{10052495-8BC8-4CFB-94B1-B0429F101A0D}" type="datetimeFigureOut">
               <a:rPr lang="sk-SK" smtClean="0"/>
-              <a:t>19. 3. 2026</a:t>
+              <a:t>24. 3. 2026</a:t>
             </a:fld>
             <a:endParaRPr lang="sk-SK"/>
           </a:p>
@@ -2586,7 +2586,7 @@
           <a:p>
             <a:fld id="{10052495-8BC8-4CFB-94B1-B0429F101A0D}" type="datetimeFigureOut">
               <a:rPr lang="sk-SK" smtClean="0"/>
-              <a:t>19. 3. 2026</a:t>
+              <a:t>24. 3. 2026</a:t>
             </a:fld>
             <a:endParaRPr lang="sk-SK"/>
           </a:p>
@@ -4515,6 +4515,10 @@
             <a:r>
               <a:rPr lang="sk-SK" dirty="0"/>
               <a:t>Príjemca v každom ACK segmente informuje, koľko bajtov je ešte </a:t>
+            </a:r>
+            <a:r>
+              <a:rPr lang="en-US" dirty="0"/>
+              <a:t>s</a:t>
             </a:r>
             <a:r>
               <a:rPr lang="sk-SK" dirty="0" err="1"/>
